--- a/projects/food-redistribution-database/food-redistribution-database.pptx
+++ b/projects/food-redistribution-database/food-redistribution-database.pptx
@@ -3538,6 +3538,7 @@
       <p:sp>
         <p:nvSpPr>
           <p:cNvPr id="6" name="camelliapramanik.github.io">
+            <ns0:hlinkClick xmlns:ns0="http://schemas.openxmlformats.org/drawingml/2006/main" xmlns:ns1="http://schemas.openxmlformats.org/officeDocument/2006/relationships" ns1:id="Rff0d50ef2c9f436e" tooltip="Open https://camelliapramanik.github.io/"/>
             <a:extLst xmlns:a="http://schemas.openxmlformats.org/drawingml/2006/main">
               <a:ext uri="{FF2B5EF4-FFF2-40B4-BE49-F238E27FC236}">
                 <a16:creationId xmlns:a16="http://schemas.microsoft.com/office/drawing/2014/main" id="{5A9F090E-A08E-47F5-A6A6-68E1382CC3D6}"/>
